--- a/design.pptx
+++ b/design.pptx
@@ -11,6 +11,7 @@
     <p:sldId id="259" r:id="rId5"/>
     <p:sldId id="260" r:id="rId6"/>
     <p:sldId id="261" r:id="rId7"/>
+    <p:sldId id="262" r:id="rId8"/>
   </p:sldIdLst>
   <p:sldSz cx="12192000" cy="6858000"/>
   <p:notesSz cx="6858000" cy="9144000"/>
@@ -264,7 +265,7 @@
           <a:p>
             <a:fld id="{51DB3AB9-1788-4567-B026-B03BFA098257}" type="datetimeFigureOut">
               <a:rPr lang="en-US" smtClean="0"/>
-              <a:t>24/03/2025</a:t>
+              <a:t>20/04/2025</a:t>
             </a:fld>
             <a:endParaRPr lang="en-US"/>
           </a:p>
@@ -462,7 +463,7 @@
           <a:p>
             <a:fld id="{51DB3AB9-1788-4567-B026-B03BFA098257}" type="datetimeFigureOut">
               <a:rPr lang="en-US" smtClean="0"/>
-              <a:t>24/03/2025</a:t>
+              <a:t>20/04/2025</a:t>
             </a:fld>
             <a:endParaRPr lang="en-US"/>
           </a:p>
@@ -670,7 +671,7 @@
           <a:p>
             <a:fld id="{51DB3AB9-1788-4567-B026-B03BFA098257}" type="datetimeFigureOut">
               <a:rPr lang="en-US" smtClean="0"/>
-              <a:t>24/03/2025</a:t>
+              <a:t>20/04/2025</a:t>
             </a:fld>
             <a:endParaRPr lang="en-US"/>
           </a:p>
@@ -868,7 +869,7 @@
           <a:p>
             <a:fld id="{51DB3AB9-1788-4567-B026-B03BFA098257}" type="datetimeFigureOut">
               <a:rPr lang="en-US" smtClean="0"/>
-              <a:t>24/03/2025</a:t>
+              <a:t>20/04/2025</a:t>
             </a:fld>
             <a:endParaRPr lang="en-US"/>
           </a:p>
@@ -1143,7 +1144,7 @@
           <a:p>
             <a:fld id="{51DB3AB9-1788-4567-B026-B03BFA098257}" type="datetimeFigureOut">
               <a:rPr lang="en-US" smtClean="0"/>
-              <a:t>24/03/2025</a:t>
+              <a:t>20/04/2025</a:t>
             </a:fld>
             <a:endParaRPr lang="en-US"/>
           </a:p>
@@ -1408,7 +1409,7 @@
           <a:p>
             <a:fld id="{51DB3AB9-1788-4567-B026-B03BFA098257}" type="datetimeFigureOut">
               <a:rPr lang="en-US" smtClean="0"/>
-              <a:t>24/03/2025</a:t>
+              <a:t>20/04/2025</a:t>
             </a:fld>
             <a:endParaRPr lang="en-US"/>
           </a:p>
@@ -1820,7 +1821,7 @@
           <a:p>
             <a:fld id="{51DB3AB9-1788-4567-B026-B03BFA098257}" type="datetimeFigureOut">
               <a:rPr lang="en-US" smtClean="0"/>
-              <a:t>24/03/2025</a:t>
+              <a:t>20/04/2025</a:t>
             </a:fld>
             <a:endParaRPr lang="en-US"/>
           </a:p>
@@ -1961,7 +1962,7 @@
           <a:p>
             <a:fld id="{51DB3AB9-1788-4567-B026-B03BFA098257}" type="datetimeFigureOut">
               <a:rPr lang="en-US" smtClean="0"/>
-              <a:t>24/03/2025</a:t>
+              <a:t>20/04/2025</a:t>
             </a:fld>
             <a:endParaRPr lang="en-US"/>
           </a:p>
@@ -2074,7 +2075,7 @@
           <a:p>
             <a:fld id="{51DB3AB9-1788-4567-B026-B03BFA098257}" type="datetimeFigureOut">
               <a:rPr lang="en-US" smtClean="0"/>
-              <a:t>24/03/2025</a:t>
+              <a:t>20/04/2025</a:t>
             </a:fld>
             <a:endParaRPr lang="en-US"/>
           </a:p>
@@ -2385,7 +2386,7 @@
           <a:p>
             <a:fld id="{51DB3AB9-1788-4567-B026-B03BFA098257}" type="datetimeFigureOut">
               <a:rPr lang="en-US" smtClean="0"/>
-              <a:t>24/03/2025</a:t>
+              <a:t>20/04/2025</a:t>
             </a:fld>
             <a:endParaRPr lang="en-US"/>
           </a:p>
@@ -2673,7 +2674,7 @@
           <a:p>
             <a:fld id="{51DB3AB9-1788-4567-B026-B03BFA098257}" type="datetimeFigureOut">
               <a:rPr lang="en-US" smtClean="0"/>
-              <a:t>24/03/2025</a:t>
+              <a:t>20/04/2025</a:t>
             </a:fld>
             <a:endParaRPr lang="en-US"/>
           </a:p>
@@ -2914,7 +2915,7 @@
           <a:p>
             <a:fld id="{51DB3AB9-1788-4567-B026-B03BFA098257}" type="datetimeFigureOut">
               <a:rPr lang="en-US" smtClean="0"/>
-              <a:t>24/03/2025</a:t>
+              <a:t>20/04/2025</a:t>
             </a:fld>
             <a:endParaRPr lang="en-US"/>
           </a:p>
@@ -3847,6 +3848,72 @@
 </p:sld>
 </file>
 
+<file path=ppt/slides/slide7.xml><?xml version="1.0" encoding="utf-8"?>
+<p:sld xmlns:a="http://schemas.openxmlformats.org/drawingml/2006/main" xmlns:r="http://schemas.openxmlformats.org/officeDocument/2006/relationships" xmlns:p="http://schemas.openxmlformats.org/presentationml/2006/main">
+  <p:cSld>
+    <p:spTree>
+      <p:nvGrpSpPr>
+        <p:cNvPr id="1" name="">
+          <a:extLst>
+            <a:ext uri="{FF2B5EF4-FFF2-40B4-BE49-F238E27FC236}">
+              <a16:creationId xmlns:a16="http://schemas.microsoft.com/office/drawing/2014/main" id="{D38AE4AC-3B53-C839-821C-172F2EC15377}"/>
+            </a:ext>
+          </a:extLst>
+        </p:cNvPr>
+        <p:cNvGrpSpPr/>
+        <p:nvPr/>
+      </p:nvGrpSpPr>
+      <p:grpSpPr>
+        <a:xfrm>
+          <a:off x="0" y="0"/>
+          <a:ext cx="0" cy="0"/>
+          <a:chOff x="0" y="0"/>
+          <a:chExt cx="0" cy="0"/>
+        </a:xfrm>
+      </p:grpSpPr>
+      <p:pic>
+        <p:nvPicPr>
+          <p:cNvPr id="3" name="Picture 2">
+            <a:extLst>
+              <a:ext uri="{FF2B5EF4-FFF2-40B4-BE49-F238E27FC236}">
+                <a16:creationId xmlns:a16="http://schemas.microsoft.com/office/drawing/2014/main" id="{E0AC5F24-AF76-D8E4-8E1C-FD37219D4847}"/>
+              </a:ext>
+            </a:extLst>
+          </p:cNvPr>
+          <p:cNvPicPr>
+            <a:picLocks noChangeAspect="1"/>
+          </p:cNvPicPr>
+          <p:nvPr/>
+        </p:nvPicPr>
+        <p:blipFill>
+          <a:blip r:embed="rId2"/>
+          <a:stretch>
+            <a:fillRect/>
+          </a:stretch>
+        </p:blipFill>
+        <p:spPr>
+          <a:xfrm>
+            <a:off x="685045" y="1056944"/>
+            <a:ext cx="10821910" cy="4744112"/>
+          </a:xfrm>
+          <a:prstGeom prst="rect">
+            <a:avLst/>
+          </a:prstGeom>
+        </p:spPr>
+      </p:pic>
+    </p:spTree>
+    <p:extLst>
+      <p:ext uri="{BB962C8B-B14F-4D97-AF65-F5344CB8AC3E}">
+        <p14:creationId xmlns:p14="http://schemas.microsoft.com/office/powerpoint/2010/main" val="1863096334"/>
+      </p:ext>
+    </p:extLst>
+  </p:cSld>
+  <p:clrMapOvr>
+    <a:masterClrMapping/>
+  </p:clrMapOvr>
+</p:sld>
+</file>
+
 <file path=ppt/theme/theme1.xml><?xml version="1.0" encoding="utf-8"?>
 <a:theme xmlns:a="http://schemas.openxmlformats.org/drawingml/2006/main" name="Office Theme">
   <a:themeElements>

--- a/design.pptx
+++ b/design.pptx
@@ -12,6 +12,7 @@
     <p:sldId id="260" r:id="rId6"/>
     <p:sldId id="261" r:id="rId7"/>
     <p:sldId id="262" r:id="rId8"/>
+    <p:sldId id="263" r:id="rId9"/>
   </p:sldIdLst>
   <p:sldSz cx="12192000" cy="6858000"/>
   <p:notesSz cx="6858000" cy="9144000"/>
@@ -265,7 +266,7 @@
           <a:p>
             <a:fld id="{51DB3AB9-1788-4567-B026-B03BFA098257}" type="datetimeFigureOut">
               <a:rPr lang="en-US" smtClean="0"/>
-              <a:t>20/04/2025</a:t>
+              <a:t>22/04/2025</a:t>
             </a:fld>
             <a:endParaRPr lang="en-US"/>
           </a:p>
@@ -463,7 +464,7 @@
           <a:p>
             <a:fld id="{51DB3AB9-1788-4567-B026-B03BFA098257}" type="datetimeFigureOut">
               <a:rPr lang="en-US" smtClean="0"/>
-              <a:t>20/04/2025</a:t>
+              <a:t>22/04/2025</a:t>
             </a:fld>
             <a:endParaRPr lang="en-US"/>
           </a:p>
@@ -671,7 +672,7 @@
           <a:p>
             <a:fld id="{51DB3AB9-1788-4567-B026-B03BFA098257}" type="datetimeFigureOut">
               <a:rPr lang="en-US" smtClean="0"/>
-              <a:t>20/04/2025</a:t>
+              <a:t>22/04/2025</a:t>
             </a:fld>
             <a:endParaRPr lang="en-US"/>
           </a:p>
@@ -869,7 +870,7 @@
           <a:p>
             <a:fld id="{51DB3AB9-1788-4567-B026-B03BFA098257}" type="datetimeFigureOut">
               <a:rPr lang="en-US" smtClean="0"/>
-              <a:t>20/04/2025</a:t>
+              <a:t>22/04/2025</a:t>
             </a:fld>
             <a:endParaRPr lang="en-US"/>
           </a:p>
@@ -1144,7 +1145,7 @@
           <a:p>
             <a:fld id="{51DB3AB9-1788-4567-B026-B03BFA098257}" type="datetimeFigureOut">
               <a:rPr lang="en-US" smtClean="0"/>
-              <a:t>20/04/2025</a:t>
+              <a:t>22/04/2025</a:t>
             </a:fld>
             <a:endParaRPr lang="en-US"/>
           </a:p>
@@ -1409,7 +1410,7 @@
           <a:p>
             <a:fld id="{51DB3AB9-1788-4567-B026-B03BFA098257}" type="datetimeFigureOut">
               <a:rPr lang="en-US" smtClean="0"/>
-              <a:t>20/04/2025</a:t>
+              <a:t>22/04/2025</a:t>
             </a:fld>
             <a:endParaRPr lang="en-US"/>
           </a:p>
@@ -1821,7 +1822,7 @@
           <a:p>
             <a:fld id="{51DB3AB9-1788-4567-B026-B03BFA098257}" type="datetimeFigureOut">
               <a:rPr lang="en-US" smtClean="0"/>
-              <a:t>20/04/2025</a:t>
+              <a:t>22/04/2025</a:t>
             </a:fld>
             <a:endParaRPr lang="en-US"/>
           </a:p>
@@ -1962,7 +1963,7 @@
           <a:p>
             <a:fld id="{51DB3AB9-1788-4567-B026-B03BFA098257}" type="datetimeFigureOut">
               <a:rPr lang="en-US" smtClean="0"/>
-              <a:t>20/04/2025</a:t>
+              <a:t>22/04/2025</a:t>
             </a:fld>
             <a:endParaRPr lang="en-US"/>
           </a:p>
@@ -2075,7 +2076,7 @@
           <a:p>
             <a:fld id="{51DB3AB9-1788-4567-B026-B03BFA098257}" type="datetimeFigureOut">
               <a:rPr lang="en-US" smtClean="0"/>
-              <a:t>20/04/2025</a:t>
+              <a:t>22/04/2025</a:t>
             </a:fld>
             <a:endParaRPr lang="en-US"/>
           </a:p>
@@ -2386,7 +2387,7 @@
           <a:p>
             <a:fld id="{51DB3AB9-1788-4567-B026-B03BFA098257}" type="datetimeFigureOut">
               <a:rPr lang="en-US" smtClean="0"/>
-              <a:t>20/04/2025</a:t>
+              <a:t>22/04/2025</a:t>
             </a:fld>
             <a:endParaRPr lang="en-US"/>
           </a:p>
@@ -2674,7 +2675,7 @@
           <a:p>
             <a:fld id="{51DB3AB9-1788-4567-B026-B03BFA098257}" type="datetimeFigureOut">
               <a:rPr lang="en-US" smtClean="0"/>
-              <a:t>20/04/2025</a:t>
+              <a:t>22/04/2025</a:t>
             </a:fld>
             <a:endParaRPr lang="en-US"/>
           </a:p>
@@ -2915,7 +2916,7 @@
           <a:p>
             <a:fld id="{51DB3AB9-1788-4567-B026-B03BFA098257}" type="datetimeFigureOut">
               <a:rPr lang="en-US" smtClean="0"/>
-              <a:t>20/04/2025</a:t>
+              <a:t>22/04/2025</a:t>
             </a:fld>
             <a:endParaRPr lang="en-US"/>
           </a:p>
@@ -3761,7 +3762,7 @@
         </p:blipFill>
         <p:spPr>
           <a:xfrm>
-            <a:off x="4466997" y="1347497"/>
+            <a:off x="6096000" y="1347497"/>
             <a:ext cx="3258005" cy="4163006"/>
           </a:xfrm>
           <a:prstGeom prst="rect">
@@ -3905,6 +3906,347 @@
     <p:extLst>
       <p:ext uri="{BB962C8B-B14F-4D97-AF65-F5344CB8AC3E}">
         <p14:creationId xmlns:p14="http://schemas.microsoft.com/office/powerpoint/2010/main" val="1863096334"/>
+      </p:ext>
+    </p:extLst>
+  </p:cSld>
+  <p:clrMapOvr>
+    <a:masterClrMapping/>
+  </p:clrMapOvr>
+</p:sld>
+</file>
+
+<file path=ppt/slides/slide8.xml><?xml version="1.0" encoding="utf-8"?>
+<p:sld xmlns:a="http://schemas.openxmlformats.org/drawingml/2006/main" xmlns:r="http://schemas.openxmlformats.org/officeDocument/2006/relationships" xmlns:p="http://schemas.openxmlformats.org/presentationml/2006/main">
+  <p:cSld>
+    <p:spTree>
+      <p:nvGrpSpPr>
+        <p:cNvPr id="1" name="">
+          <a:extLst>
+            <a:ext uri="{FF2B5EF4-FFF2-40B4-BE49-F238E27FC236}">
+              <a16:creationId xmlns:a16="http://schemas.microsoft.com/office/drawing/2014/main" id="{E0BD213E-E334-B273-580D-50527D0A2616}"/>
+            </a:ext>
+          </a:extLst>
+        </p:cNvPr>
+        <p:cNvGrpSpPr/>
+        <p:nvPr/>
+      </p:nvGrpSpPr>
+      <p:grpSpPr>
+        <a:xfrm>
+          <a:off x="0" y="0"/>
+          <a:ext cx="0" cy="0"/>
+          <a:chOff x="0" y="0"/>
+          <a:chExt cx="0" cy="0"/>
+        </a:xfrm>
+      </p:grpSpPr>
+      <p:sp>
+        <p:nvSpPr>
+          <p:cNvPr id="2" name="TextBox 1">
+            <a:extLst>
+              <a:ext uri="{FF2B5EF4-FFF2-40B4-BE49-F238E27FC236}">
+                <a16:creationId xmlns:a16="http://schemas.microsoft.com/office/drawing/2014/main" id="{8114A511-C09C-5C89-C1FE-107FDD929FAE}"/>
+              </a:ext>
+            </a:extLst>
+          </p:cNvPr>
+          <p:cNvSpPr txBox="1"/>
+          <p:nvPr/>
+        </p:nvSpPr>
+        <p:spPr>
+          <a:xfrm>
+            <a:off x="2313992" y="1110342"/>
+            <a:ext cx="3918857" cy="2308324"/>
+          </a:xfrm>
+          <a:prstGeom prst="rect">
+            <a:avLst/>
+          </a:prstGeom>
+          <a:noFill/>
+        </p:spPr>
+        <p:txBody>
+          <a:bodyPr wrap="square" rtlCol="0">
+            <a:spAutoFit/>
+          </a:bodyPr>
+          <a:lstStyle/>
+          <a:p>
+            <a:r>
+              <a:rPr lang="en-US" dirty="0"/>
+              <a:t>Trang </a:t>
+            </a:r>
+            <a:r>
+              <a:rPr lang="en-US" dirty="0" err="1"/>
+              <a:t>myskills</a:t>
+            </a:r>
+            <a:r>
+              <a:rPr lang="en-US" dirty="0"/>
+              <a:t>:</a:t>
+            </a:r>
+            <a:br>
+              <a:rPr lang="en-US" dirty="0"/>
+            </a:br>
+            <a:r>
+              <a:rPr lang="en-US" dirty="0"/>
+              <a:t>- </a:t>
+            </a:r>
+            <a:r>
+              <a:rPr lang="en-US" dirty="0" err="1"/>
+              <a:t>expan</a:t>
+            </a:r>
+            <a:r>
+              <a:rPr lang="en-US" dirty="0"/>
+              <a:t> </a:t>
+            </a:r>
+            <a:r>
+              <a:rPr lang="en-US" dirty="0" err="1"/>
+              <a:t>mỗi</a:t>
+            </a:r>
+            <a:r>
+              <a:rPr lang="en-US" dirty="0"/>
+              <a:t> </a:t>
+            </a:r>
+            <a:r>
+              <a:rPr lang="en-US" dirty="0" err="1"/>
+              <a:t>phần</a:t>
+            </a:r>
+            <a:r>
+              <a:rPr lang="en-US" dirty="0"/>
+              <a:t> </a:t>
+            </a:r>
+            <a:r>
+              <a:rPr lang="en-US" dirty="0" err="1"/>
+              <a:t>mỗi</a:t>
+            </a:r>
+            <a:r>
+              <a:rPr lang="en-US" dirty="0"/>
+              <a:t> </a:t>
+            </a:r>
+            <a:r>
+              <a:rPr lang="en-US" dirty="0" err="1"/>
+              <a:t>loại</a:t>
+            </a:r>
+            <a:r>
+              <a:rPr lang="en-US" dirty="0"/>
+              <a:t> </a:t>
+            </a:r>
+            <a:r>
+              <a:rPr lang="en-US" dirty="0" err="1"/>
+              <a:t>riêng</a:t>
+            </a:r>
+            <a:br>
+              <a:rPr lang="en-US" dirty="0"/>
+            </a:br>
+            <a:r>
+              <a:rPr lang="en-US" dirty="0"/>
+              <a:t>- project </a:t>
+            </a:r>
+            <a:r>
+              <a:rPr lang="en-US" dirty="0" err="1"/>
+              <a:t>liên</a:t>
+            </a:r>
+            <a:r>
+              <a:rPr lang="en-US" dirty="0"/>
+              <a:t> </a:t>
+            </a:r>
+            <a:r>
+              <a:rPr lang="en-US" dirty="0" err="1"/>
+              <a:t>quan</a:t>
+            </a:r>
+            <a:r>
+              <a:rPr lang="en-US" dirty="0"/>
+              <a:t>.</a:t>
+            </a:r>
+            <a:br>
+              <a:rPr lang="en-US" dirty="0"/>
+            </a:br>
+            <a:r>
+              <a:rPr lang="en-US" dirty="0"/>
+              <a:t>- </a:t>
+            </a:r>
+            <a:r>
+              <a:rPr lang="en-US" dirty="0" err="1"/>
+              <a:t>năm</a:t>
+            </a:r>
+            <a:r>
+              <a:rPr lang="en-US" dirty="0"/>
+              <a:t> </a:t>
+            </a:r>
+            <a:r>
+              <a:rPr lang="en-US" dirty="0" err="1"/>
+              <a:t>kinh</a:t>
+            </a:r>
+            <a:r>
+              <a:rPr lang="en-US" dirty="0"/>
+              <a:t> </a:t>
+            </a:r>
+            <a:r>
+              <a:rPr lang="en-US" dirty="0" err="1"/>
+              <a:t>nghiệm</a:t>
+            </a:r>
+            <a:endParaRPr lang="en-US" dirty="0"/>
+          </a:p>
+          <a:p>
+            <a:pPr marL="285750" indent="-285750">
+              <a:buFontTx/>
+              <a:buChar char="-"/>
+            </a:pPr>
+            <a:r>
+              <a:rPr lang="en-US" dirty="0"/>
+              <a:t>Hover 1 </a:t>
+            </a:r>
+            <a:r>
+              <a:rPr lang="en-US" dirty="0" err="1"/>
+              <a:t>thằng</a:t>
+            </a:r>
+            <a:r>
+              <a:rPr lang="en-US" dirty="0"/>
+              <a:t> </a:t>
+            </a:r>
+            <a:r>
+              <a:rPr lang="en-US" dirty="0" err="1"/>
+              <a:t>mờ</a:t>
+            </a:r>
+            <a:r>
+              <a:rPr lang="en-US" dirty="0"/>
+              <a:t> </a:t>
+            </a:r>
+            <a:r>
+              <a:rPr lang="en-US" dirty="0" err="1"/>
+              <a:t>các</a:t>
+            </a:r>
+            <a:r>
+              <a:rPr lang="en-US" dirty="0"/>
+              <a:t> </a:t>
+            </a:r>
+            <a:r>
+              <a:rPr lang="en-US" dirty="0" err="1"/>
+              <a:t>thằng</a:t>
+            </a:r>
+            <a:r>
+              <a:rPr lang="en-US" dirty="0"/>
+              <a:t> </a:t>
+            </a:r>
+            <a:r>
+              <a:rPr lang="en-US" dirty="0" err="1"/>
+              <a:t>còn</a:t>
+            </a:r>
+            <a:r>
+              <a:rPr lang="en-US" dirty="0"/>
+              <a:t> </a:t>
+            </a:r>
+            <a:r>
+              <a:rPr lang="en-US" dirty="0" err="1"/>
+              <a:t>lại</a:t>
+            </a:r>
+            <a:r>
+              <a:rPr lang="en-US" dirty="0"/>
+              <a:t>.</a:t>
+            </a:r>
+          </a:p>
+          <a:p>
+            <a:pPr marL="285750" indent="-285750">
+              <a:buFontTx/>
+              <a:buChar char="-"/>
+            </a:pPr>
+            <a:r>
+              <a:rPr lang="en-US" dirty="0"/>
+              <a:t>Hiệu </a:t>
+            </a:r>
+            <a:r>
+              <a:rPr lang="en-US" dirty="0" err="1"/>
+              <a:t>ứng</a:t>
+            </a:r>
+            <a:r>
+              <a:rPr lang="en-US" dirty="0"/>
+              <a:t> </a:t>
+            </a:r>
+            <a:r>
+              <a:rPr lang="en-US" dirty="0" err="1"/>
+              <a:t>trượt</a:t>
+            </a:r>
+            <a:r>
+              <a:rPr lang="en-US" dirty="0"/>
+              <a:t> </a:t>
+            </a:r>
+            <a:r>
+              <a:rPr lang="en-US" dirty="0" err="1"/>
+              <a:t>lên</a:t>
+            </a:r>
+            <a:r>
+              <a:rPr lang="en-US" dirty="0"/>
+              <a:t> </a:t>
+            </a:r>
+            <a:r>
+              <a:rPr lang="en-US" dirty="0" err="1"/>
+              <a:t>có</a:t>
+            </a:r>
+            <a:r>
+              <a:rPr lang="en-US" dirty="0"/>
+              <a:t> </a:t>
+            </a:r>
+            <a:r>
+              <a:rPr lang="en-US" dirty="0" err="1"/>
+              <a:t>thanh</a:t>
+            </a:r>
+            <a:r>
+              <a:rPr lang="en-US" dirty="0"/>
+              <a:t> </a:t>
+            </a:r>
+            <a:r>
+              <a:rPr lang="en-US" dirty="0" err="1"/>
+              <a:t>vuông</a:t>
+            </a:r>
+            <a:r>
+              <a:rPr lang="en-US" dirty="0"/>
+              <a:t> </a:t>
+            </a:r>
+            <a:r>
+              <a:rPr lang="en-US" dirty="0" err="1"/>
+              <a:t>hiện</a:t>
+            </a:r>
+            <a:r>
+              <a:rPr lang="en-US" dirty="0"/>
+              <a:t> </a:t>
+            </a:r>
+            <a:r>
+              <a:rPr lang="en-US" dirty="0" err="1"/>
+              <a:t>ra</a:t>
+            </a:r>
+            <a:r>
+              <a:rPr lang="en-US" dirty="0"/>
+              <a:t> </a:t>
+            </a:r>
+            <a:r>
+              <a:rPr lang="en-US" dirty="0" err="1"/>
+              <a:t>ghi</a:t>
+            </a:r>
+            <a:r>
+              <a:rPr lang="en-US" dirty="0"/>
+              <a:t> project </a:t>
+            </a:r>
+            <a:r>
+              <a:rPr lang="en-US" dirty="0" err="1"/>
+              <a:t>liên</a:t>
+            </a:r>
+            <a:r>
+              <a:rPr lang="en-US" dirty="0"/>
+              <a:t> </a:t>
+            </a:r>
+            <a:r>
+              <a:rPr lang="en-US" dirty="0" err="1"/>
+              <a:t>quan</a:t>
+            </a:r>
+            <a:r>
+              <a:rPr lang="en-US" dirty="0"/>
+              <a:t>.</a:t>
+            </a:r>
+            <a:br>
+              <a:rPr lang="en-US" dirty="0"/>
+            </a:br>
+            <a:endParaRPr lang="en-US" dirty="0"/>
+          </a:p>
+        </p:txBody>
+      </p:sp>
+    </p:spTree>
+    <p:extLst>
+      <p:ext uri="{BB962C8B-B14F-4D97-AF65-F5344CB8AC3E}">
+        <p14:creationId xmlns:p14="http://schemas.microsoft.com/office/powerpoint/2010/main" val="4040448767"/>
       </p:ext>
     </p:extLst>
   </p:cSld>

--- a/design.pptx
+++ b/design.pptx
@@ -266,7 +266,7 @@
           <a:p>
             <a:fld id="{51DB3AB9-1788-4567-B026-B03BFA098257}" type="datetimeFigureOut">
               <a:rPr lang="en-US" smtClean="0"/>
-              <a:t>22/04/2025</a:t>
+              <a:t>26/04/2025</a:t>
             </a:fld>
             <a:endParaRPr lang="en-US"/>
           </a:p>
@@ -464,7 +464,7 @@
           <a:p>
             <a:fld id="{51DB3AB9-1788-4567-B026-B03BFA098257}" type="datetimeFigureOut">
               <a:rPr lang="en-US" smtClean="0"/>
-              <a:t>22/04/2025</a:t>
+              <a:t>26/04/2025</a:t>
             </a:fld>
             <a:endParaRPr lang="en-US"/>
           </a:p>
@@ -672,7 +672,7 @@
           <a:p>
             <a:fld id="{51DB3AB9-1788-4567-B026-B03BFA098257}" type="datetimeFigureOut">
               <a:rPr lang="en-US" smtClean="0"/>
-              <a:t>22/04/2025</a:t>
+              <a:t>26/04/2025</a:t>
             </a:fld>
             <a:endParaRPr lang="en-US"/>
           </a:p>
@@ -870,7 +870,7 @@
           <a:p>
             <a:fld id="{51DB3AB9-1788-4567-B026-B03BFA098257}" type="datetimeFigureOut">
               <a:rPr lang="en-US" smtClean="0"/>
-              <a:t>22/04/2025</a:t>
+              <a:t>26/04/2025</a:t>
             </a:fld>
             <a:endParaRPr lang="en-US"/>
           </a:p>
@@ -1145,7 +1145,7 @@
           <a:p>
             <a:fld id="{51DB3AB9-1788-4567-B026-B03BFA098257}" type="datetimeFigureOut">
               <a:rPr lang="en-US" smtClean="0"/>
-              <a:t>22/04/2025</a:t>
+              <a:t>26/04/2025</a:t>
             </a:fld>
             <a:endParaRPr lang="en-US"/>
           </a:p>
@@ -1410,7 +1410,7 @@
           <a:p>
             <a:fld id="{51DB3AB9-1788-4567-B026-B03BFA098257}" type="datetimeFigureOut">
               <a:rPr lang="en-US" smtClean="0"/>
-              <a:t>22/04/2025</a:t>
+              <a:t>26/04/2025</a:t>
             </a:fld>
             <a:endParaRPr lang="en-US"/>
           </a:p>
@@ -1822,7 +1822,7 @@
           <a:p>
             <a:fld id="{51DB3AB9-1788-4567-B026-B03BFA098257}" type="datetimeFigureOut">
               <a:rPr lang="en-US" smtClean="0"/>
-              <a:t>22/04/2025</a:t>
+              <a:t>26/04/2025</a:t>
             </a:fld>
             <a:endParaRPr lang="en-US"/>
           </a:p>
@@ -1963,7 +1963,7 @@
           <a:p>
             <a:fld id="{51DB3AB9-1788-4567-B026-B03BFA098257}" type="datetimeFigureOut">
               <a:rPr lang="en-US" smtClean="0"/>
-              <a:t>22/04/2025</a:t>
+              <a:t>26/04/2025</a:t>
             </a:fld>
             <a:endParaRPr lang="en-US"/>
           </a:p>
@@ -2076,7 +2076,7 @@
           <a:p>
             <a:fld id="{51DB3AB9-1788-4567-B026-B03BFA098257}" type="datetimeFigureOut">
               <a:rPr lang="en-US" smtClean="0"/>
-              <a:t>22/04/2025</a:t>
+              <a:t>26/04/2025</a:t>
             </a:fld>
             <a:endParaRPr lang="en-US"/>
           </a:p>
@@ -2387,7 +2387,7 @@
           <a:p>
             <a:fld id="{51DB3AB9-1788-4567-B026-B03BFA098257}" type="datetimeFigureOut">
               <a:rPr lang="en-US" smtClean="0"/>
-              <a:t>22/04/2025</a:t>
+              <a:t>26/04/2025</a:t>
             </a:fld>
             <a:endParaRPr lang="en-US"/>
           </a:p>
@@ -2675,7 +2675,7 @@
           <a:p>
             <a:fld id="{51DB3AB9-1788-4567-B026-B03BFA098257}" type="datetimeFigureOut">
               <a:rPr lang="en-US" smtClean="0"/>
-              <a:t>22/04/2025</a:t>
+              <a:t>26/04/2025</a:t>
             </a:fld>
             <a:endParaRPr lang="en-US"/>
           </a:p>
@@ -2916,7 +2916,7 @@
           <a:p>
             <a:fld id="{51DB3AB9-1788-4567-B026-B03BFA098257}" type="datetimeFigureOut">
               <a:rPr lang="en-US" smtClean="0"/>
-              <a:t>22/04/2025</a:t>
+              <a:t>26/04/2025</a:t>
             </a:fld>
             <a:endParaRPr lang="en-US"/>
           </a:p>
@@ -3952,8 +3952,8 @@
         </p:nvSpPr>
         <p:spPr>
           <a:xfrm>
-            <a:off x="2313992" y="1110342"/>
-            <a:ext cx="3918857" cy="2308324"/>
+            <a:off x="2295330" y="447756"/>
+            <a:ext cx="3918857" cy="6463308"/>
           </a:xfrm>
           <a:prstGeom prst="rect">
             <a:avLst/>
@@ -4236,10 +4236,101 @@
               <a:rPr lang="en-US" dirty="0"/>
               <a:t>.</a:t>
             </a:r>
+          </a:p>
+          <a:p>
+            <a:pPr marL="285750" indent="-285750">
+              <a:buFontTx/>
+              <a:buChar char="-"/>
+            </a:pPr>
+            <a:r>
+              <a:rPr lang="en-US" dirty="0">
+                <a:hlinkClick r:id="rId2"/>
+              </a:rPr>
+              <a:t>https://uiverse.io/akshat-patel28/quick-baboon-29</a:t>
+            </a:r>
+            <a:endParaRPr lang="en-US" dirty="0"/>
+          </a:p>
+          <a:p>
+            <a:pPr marL="285750" indent="-285750">
+              <a:buFontTx/>
+              <a:buChar char="-"/>
+            </a:pPr>
+            <a:r>
+              <a:rPr lang="en-US" dirty="0">
+                <a:hlinkClick r:id="rId3"/>
+              </a:rPr>
+              <a:t>https://uiverse.io/Praashoo7/thin-sloth-31</a:t>
+            </a:r>
+            <a:endParaRPr lang="en-US" dirty="0"/>
+          </a:p>
+          <a:p>
+            <a:pPr marL="285750" indent="-285750">
+              <a:buFontTx/>
+              <a:buChar char="-"/>
+            </a:pPr>
+            <a:r>
+              <a:rPr lang="en-US" dirty="0">
+                <a:hlinkClick r:id="rId4"/>
+              </a:rPr>
+              <a:t>https://uiverse.io/pathikcomp/brave-pig-89</a:t>
+            </a:r>
+            <a:endParaRPr lang="en-US" dirty="0"/>
+          </a:p>
+          <a:p>
+            <a:pPr marL="285750" indent="-285750">
+              <a:buFontTx/>
+              <a:buChar char="-"/>
+            </a:pPr>
+            <a:r>
+              <a:rPr lang="en-US" dirty="0">
+                <a:hlinkClick r:id="rId5"/>
+              </a:rPr>
+              <a:t>https://uiverse.io/google_4193/quick-kangaroo-31</a:t>
+            </a:r>
+            <a:endParaRPr lang="en-US" dirty="0"/>
+          </a:p>
+          <a:p>
+            <a:pPr marL="285750" indent="-285750">
+              <a:buFontTx/>
+              <a:buChar char="-"/>
+            </a:pPr>
+            <a:r>
+              <a:rPr lang="en-US" dirty="0">
+                <a:hlinkClick r:id="rId6"/>
+              </a:rPr>
+              <a:t>https://uiverse.io/abrahamcalsin/odd-zebra-96</a:t>
+            </a:r>
+            <a:endParaRPr lang="en-US" dirty="0"/>
+          </a:p>
+          <a:p>
+            <a:pPr marL="285750" indent="-285750">
+              <a:buFontTx/>
+              <a:buChar char="-"/>
+            </a:pPr>
+            <a:r>
+              <a:rPr lang="en-US" dirty="0">
+                <a:hlinkClick r:id="rId7"/>
+              </a:rPr>
+              <a:t>https://uiverse.io/paesjr/splendid-tiger-99</a:t>
+            </a:r>
+            <a:endParaRPr lang="en-US" dirty="0"/>
+          </a:p>
+          <a:p>
+            <a:pPr marL="285750" indent="-285750">
+              <a:buFontTx/>
+              <a:buChar char="-"/>
+            </a:pPr>
+            <a:r>
+              <a:rPr lang="en-US" dirty="0"/>
+              <a:t>https://uiverse.io/abrahamcalsin/odd-zebra-96</a:t>
+            </a:r>
             <a:br>
               <a:rPr lang="en-US" dirty="0"/>
             </a:br>
-            <a:endParaRPr lang="en-US" dirty="0"/>
+            <a:r>
+              <a:rPr lang="en-US" dirty="0"/>
+              <a:t>https://uiverse.io/00Kubi/cowardly-eagle-56</a:t>
+            </a:r>
           </a:p>
         </p:txBody>
       </p:sp>
